--- a/slides/slide_13.pptx
+++ b/slides/slide_13.pptx
@@ -26,61 +26,38 @@
       <p:bold r:id="rId9"/>
     </p:embeddedFont>
     <p:embeddedFont>
-      <p:font typeface="Bebas Neue" panose="020B0606020202050201" pitchFamily="2" charset="0"/>
+      <p:font typeface="Hanken Grotesk" panose="020B0604020202020204" charset="0"/>
       <p:regular r:id="rId10"/>
-    </p:embeddedFont>
-    <p:embeddedFont>
-      <p:font typeface="DM Mono" panose="020B0509040201040103" pitchFamily="1" charset="0"/>
-      <p:regular r:id="rId11"/>
+      <p:bold r:id="rId11"/>
       <p:italic r:id="rId12"/>
-    </p:embeddedFont>
-    <p:embeddedFont>
-      <p:font typeface="Hanken Grotesk" panose="020B0604020202020204" charset="0"/>
-      <p:regular r:id="rId13"/>
-      <p:bold r:id="rId14"/>
-      <p:italic r:id="rId15"/>
-      <p:boldItalic r:id="rId16"/>
-    </p:embeddedFont>
-    <p:embeddedFont>
-      <p:font typeface="Open Sans" panose="020B0606030504020204" pitchFamily="2" charset="0"/>
-      <p:regular r:id="rId17"/>
-      <p:bold r:id="rId18"/>
-      <p:italic r:id="rId19"/>
-      <p:boldItalic r:id="rId20"/>
+      <p:boldItalic r:id="rId13"/>
     </p:embeddedFont>
     <p:embeddedFont>
       <p:font typeface="Raleway" pitchFamily="2" charset="0"/>
-      <p:regular r:id="rId21"/>
-      <p:bold r:id="rId22"/>
-      <p:italic r:id="rId23"/>
-      <p:boldItalic r:id="rId24"/>
+      <p:regular r:id="rId14"/>
+      <p:bold r:id="rId15"/>
+      <p:italic r:id="rId16"/>
+      <p:boldItalic r:id="rId17"/>
     </p:embeddedFont>
     <p:embeddedFont>
       <p:font typeface="Raleway Black" pitchFamily="2" charset="0"/>
-      <p:bold r:id="rId25"/>
-      <p:boldItalic r:id="rId26"/>
+      <p:bold r:id="rId18"/>
+      <p:boldItalic r:id="rId19"/>
     </p:embeddedFont>
     <p:embeddedFont>
       <p:font typeface="Raleway ExtraBold" pitchFamily="2" charset="0"/>
-      <p:bold r:id="rId27"/>
-      <p:boldItalic r:id="rId28"/>
+      <p:bold r:id="rId20"/>
+      <p:boldItalic r:id="rId21"/>
     </p:embeddedFont>
     <p:embeddedFont>
       <p:font typeface="Roboto Medium" panose="02000000000000000000" pitchFamily="2" charset="0"/>
-      <p:regular r:id="rId29"/>
-      <p:italic r:id="rId30"/>
+      <p:regular r:id="rId22"/>
+      <p:italic r:id="rId23"/>
     </p:embeddedFont>
     <p:embeddedFont>
       <p:font typeface="Roboto" panose="02000000000000000000" pitchFamily="2"/>
-      <p:bold r:id="rId31"/>
-      <p:boldItalic r:id="rId32"/>
-    </p:embeddedFont>
-    <p:embeddedFont>
-      <p:font typeface="Segoe UI" panose="020B0502040204020203" pitchFamily="2" charset="0"/>
-      <p:regular r:id="rId33"/>
-      <p:bold r:id="rId34"/>
-      <p:italic r:id="rId35"/>
-      <p:boldItalic r:id="rId36"/>
+      <p:bold r:id="rId24"/>
+      <p:boldItalic r:id="rId25"/>
     </p:embeddedFont>
   </p:embeddedFontLst>
   <p:custDataLst>
@@ -884,7 +861,7 @@
           <a:bodyPr/>
           <a:lstStyle/>
           <a:p>
-            <a:fld id="{ABFB57EF-DC3D-4F93-A6C9-62F05A617768}" type="datetimeFigureOut">
+            <a:fld id="{641CF8F0-26AF-4448-84E0-953568653548}" type="datetimeFigureOut">
               <a:rPr lang="en-US" smtClean="0"/>
               <a:t>11/7/2009</a:t>
             </a:fld>
@@ -1048,7 +1025,7 @@
           <a:bodyPr/>
           <a:lstStyle/>
           <a:p>
-            <a:fld id="{31F8D5E3-E8C8-40E3-A199-6914798AEF47}" type="datetimeFigureOut">
+            <a:fld id="{6682788C-413D-4B2F-AD6B-219098FCF43A}" type="datetimeFigureOut">
               <a:rPr lang="en-US" smtClean="0"/>
               <a:t>11/7/2009</a:t>
             </a:fld>
@@ -1212,7 +1189,7 @@
           <a:bodyPr/>
           <a:lstStyle/>
           <a:p>
-            <a:fld id="{C08386FC-7149-47B8-B2AD-FBD3273D04DE}" type="datetimeFigureOut">
+            <a:fld id="{FF208E00-EAF6-4A26-8143-9E6AE4BF3130}" type="datetimeFigureOut">
               <a:rPr lang="en-US" smtClean="0"/>
               <a:t>11/7/2009</a:t>
             </a:fld>
@@ -13117,7 +13094,7 @@
           <a:bodyPr/>
           <a:lstStyle/>
           <a:p>
-            <a:fld id="{78CF39CE-4EFD-4C73-B11E-2E618A5AF622}" type="datetimeFigureOut">
+            <a:fld id="{CF53255C-34D2-4A53-808B-A6F7346908AC}" type="datetimeFigureOut">
               <a:rPr lang="en-US" smtClean="0"/>
               <a:t>11/7/2009</a:t>
             </a:fld>
@@ -33218,7 +33195,7 @@
           <a:bodyPr/>
           <a:lstStyle/>
           <a:p>
-            <a:fld id="{C178C848-197C-41AF-8A91-EAACA6BD2D7B}" type="datetimeFigureOut">
+            <a:fld id="{B6E7E754-FBAA-4359-A2EC-7E6C112CF463}" type="datetimeFigureOut">
               <a:rPr lang="en-US" smtClean="0"/>
               <a:t>11/7/2009</a:t>
             </a:fld>
@@ -38865,7 +38842,7 @@
           <a:bodyPr/>
           <a:lstStyle/>
           <a:p>
-            <a:fld id="{A55CDBF6-C031-41D0-B0CD-542C355D7777}" type="datetimeFigureOut">
+            <a:fld id="{855F8D90-A3C5-4B89-8AF6-C32450C0769A}" type="datetimeFigureOut">
               <a:rPr lang="en-US" smtClean="0"/>
               <a:t>11/7/2009</a:t>
             </a:fld>
@@ -39254,7 +39231,7 @@
           <a:bodyPr/>
           <a:lstStyle/>
           <a:p>
-            <a:fld id="{80160344-7F41-47A8-B81B-BBDACD25236D}" type="datetimeFigureOut">
+            <a:fld id="{8E9D5DB9-E3FC-424C-AFF5-F664C7BE4FAE}" type="datetimeFigureOut">
               <a:rPr lang="en-US" smtClean="0"/>
               <a:t>11/7/2009</a:t>
             </a:fld>
@@ -39367,7 +39344,7 @@
           <a:bodyPr/>
           <a:lstStyle/>
           <a:p>
-            <a:fld id="{F0AF0FF8-6EF0-4466-A337-0804721842A2}" type="datetimeFigureOut">
+            <a:fld id="{3244C19F-8EC8-4E1B-B729-33398B656CFA}" type="datetimeFigureOut">
               <a:rPr lang="en-US" smtClean="0"/>
               <a:t>11/7/2009</a:t>
             </a:fld>
@@ -39457,7 +39434,7 @@
           <a:bodyPr/>
           <a:lstStyle/>
           <a:p>
-            <a:fld id="{EFAD8C52-26BE-4AAF-85E9-604248A71210}" type="datetimeFigureOut">
+            <a:fld id="{CA6EFEB4-965B-48CA-B809-1802DAB743A0}" type="datetimeFigureOut">
               <a:rPr lang="en-US" smtClean="0"/>
               <a:t>11/7/2009</a:t>
             </a:fld>
@@ -39712,7 +39689,7 @@
           <a:bodyPr/>
           <a:lstStyle/>
           <a:p>
-            <a:fld id="{A121AE8A-FE6C-4E94-B5BB-C0C54BE4F982}" type="datetimeFigureOut">
+            <a:fld id="{2ABC704A-858A-4DE3-911F-9651B363BE38}" type="datetimeFigureOut">
               <a:rPr lang="en-US" smtClean="0"/>
               <a:t>11/7/2009</a:t>
             </a:fld>
@@ -39944,7 +39921,7 @@
           <a:bodyPr/>
           <a:lstStyle/>
           <a:p>
-            <a:fld id="{3A397879-4ED8-4005-A9A5-75A1D92724E6}" type="datetimeFigureOut">
+            <a:fld id="{3A361F35-8EB7-4797-9D8D-4DC5D1ED9BB0}" type="datetimeFigureOut">
               <a:rPr lang="en-US" smtClean="0"/>
               <a:t>11/7/2009</a:t>
             </a:fld>
@@ -41804,7 +41781,10 @@
           <a:lstStyle/>
           <a:p>
             <a:r>
-              <a:rPr lang="en"/>
+              <a:rPr lang="en" b="1">
+                <a:latin typeface="Arial"/>
+                <a:cs typeface="Arial"/>
+              </a:rPr>
               <a:t>ОРГАНИЗАЦИОННАЯ СТРУКТУРА</a:t>
             </a:r>
             <a:br>
@@ -42418,37 +42398,22 @@
             </a:lvl9pPr>
           </a:lstStyle>
           <a:p>
-            <a:pPr marL="0" lvl="0" indent="0" algn="ctr" rtl="0">
-              <a:spcBef>
-                <a:spcPct val="0"/>
-              </a:spcBef>
-              <a:spcAft>
-                <a:spcPct val="0"/>
-              </a:spcAft>
-              <a:buNone/>
-            </a:pPr>
-            <a:endParaRPr lang="en" sz="1000" b="1">
+            <a:pPr algn="ctr"/>
+            <a:r>
+              <a:rPr lang="en" sz="1000" err="1">
+                <a:solidFill>
+                  <a:schemeClr val="dk1"/>
+                </a:solidFill>
+                <a:ea typeface="Hanken Grotesk"/>
+              </a:rPr>
+              <a:t>Ген. дир</a:t>
+            </a:r>
+            <a:endParaRPr lang="en" sz="1000">
               <a:solidFill>
                 <a:schemeClr val="dk1"/>
               </a:solidFill>
-              <a:latin typeface="Hanken Grotesk"/>
               <a:ea typeface="Hanken Grotesk"/>
-              <a:cs typeface="Hanken Grotesk"/>
             </a:endParaRPr>
-          </a:p>
-          <a:p>
-            <a:pPr algn="ctr"/>
-            <a:r>
-              <a:rPr lang="en" sz="1000" err="1">
-                <a:solidFill>
-                  <a:schemeClr val="dk1"/>
-                </a:solidFill>
-                <a:latin typeface="Hanken Grotesk"/>
-                <a:ea typeface="Hanken Grotesk"/>
-                <a:cs typeface="Hanken Grotesk"/>
-              </a:rPr>
-              <a:t>Ген. дир</a:t>
-            </a:r>
           </a:p>
         </p:txBody>
       </p:sp>
@@ -42754,9 +42719,7 @@
                 <a:solidFill>
                   <a:schemeClr val="dk1"/>
                 </a:solidFill>
-                <a:latin typeface="Hanken Grotesk"/>
                 <a:ea typeface="Hanken Grotesk"/>
-                <a:cs typeface="Hanken Grotesk"/>
               </a:rPr>
               <a:t>Глава департамента</a:t>
             </a:r>
@@ -42764,9 +42727,7 @@
               <a:solidFill>
                 <a:schemeClr val="dk1"/>
               </a:solidFill>
-              <a:latin typeface="Hanken Grotesk"/>
               <a:ea typeface="Hanken Grotesk"/>
-              <a:cs typeface="Hanken Grotesk"/>
             </a:endParaRPr>
           </a:p>
         </p:txBody>
@@ -43040,16 +43001,14 @@
                 <a:solidFill>
                   <a:schemeClr val="dk1"/>
                 </a:solidFill>
-                <a:latin typeface="Hanken Grotesk"/>
                 <a:sym typeface="Hanken Grotesk"/>
               </a:rPr>
               <a:t>Глава департамента</a:t>
             </a:r>
-            <a:endParaRPr lang="en" sz="1000" err="1">
+            <a:endParaRPr lang="en" sz="1000">
               <a:solidFill>
                 <a:schemeClr val="dk1"/>
               </a:solidFill>
-              <a:latin typeface="Hanken Grotesk"/>
             </a:endParaRPr>
           </a:p>
         </p:txBody>
@@ -43323,17 +43282,13 @@
                 <a:solidFill>
                   <a:srgbClr val="FFFFFF"/>
                 </a:solidFill>
-                <a:latin typeface="Hanken Grotesk"/>
                 <a:ea typeface="Hanken Grotesk"/>
-                <a:cs typeface="Hanken Grotesk"/>
               </a:rPr>
               <a:t>Менеджер</a:t>
             </a:r>
             <a:r>
               <a:rPr lang="ru-RU" sz="1000">
-                <a:latin typeface="Hanken Grotesk"/>
                 <a:ea typeface="Hanken Grotesk"/>
-                <a:cs typeface="Hanken Grotesk"/>
               </a:rPr>
               <a:t>​</a:t>
             </a:r>
@@ -43341,9 +43296,7 @@
               <a:solidFill>
                 <a:schemeClr val="dk1"/>
               </a:solidFill>
-              <a:latin typeface="Hanken Grotesk"/>
               <a:ea typeface="Hanken Grotesk"/>
-              <a:cs typeface="Hanken Grotesk"/>
             </a:endParaRPr>
           </a:p>
         </p:txBody>
@@ -43617,12 +43570,16 @@
                 <a:solidFill>
                   <a:schemeClr val="dk1"/>
                 </a:solidFill>
-                <a:latin typeface="Hanken Grotesk"/>
                 <a:ea typeface="Hanken Grotesk"/>
-                <a:cs typeface="Hanken Grotesk"/>
               </a:rPr>
               <a:t>Менеджер</a:t>
             </a:r>
+            <a:endParaRPr lang="en" sz="1000">
+              <a:solidFill>
+                <a:schemeClr val="dk1"/>
+              </a:solidFill>
+              <a:ea typeface="Hanken Grotesk"/>
+            </a:endParaRPr>
           </a:p>
         </p:txBody>
       </p:sp>
@@ -43895,12 +43852,16 @@
                 <a:solidFill>
                   <a:schemeClr val="dk1"/>
                 </a:solidFill>
-                <a:latin typeface="Hanken Grotesk"/>
                 <a:ea typeface="Hanken Grotesk"/>
-                <a:cs typeface="Hanken Grotesk"/>
               </a:rPr>
               <a:t>Менеджер</a:t>
             </a:r>
+            <a:endParaRPr lang="en" sz="1000">
+              <a:solidFill>
+                <a:schemeClr val="dk1"/>
+              </a:solidFill>
+              <a:ea typeface="Hanken Grotesk"/>
+            </a:endParaRPr>
           </a:p>
         </p:txBody>
       </p:sp>
@@ -44181,12 +44142,16 @@
                 <a:solidFill>
                   <a:schemeClr val="dk1"/>
                 </a:solidFill>
-                <a:latin typeface="Hanken Grotesk"/>
                 <a:ea typeface="Hanken Grotesk"/>
-                <a:cs typeface="Hanken Grotesk"/>
               </a:rPr>
               <a:t>Менеджер</a:t>
             </a:r>
+            <a:endParaRPr lang="en" sz="1000">
+              <a:solidFill>
+                <a:schemeClr val="dk1"/>
+              </a:solidFill>
+              <a:ea typeface="Hanken Grotesk"/>
+            </a:endParaRPr>
           </a:p>
         </p:txBody>
       </p:sp>
@@ -44467,7 +44432,6 @@
                 <a:solidFill>
                   <a:schemeClr val="dk1"/>
                 </a:solidFill>
-                <a:latin typeface="Hanken Grotesk"/>
                 <a:sym typeface="Hanken Grotesk"/>
               </a:rPr>
               <a:t>Должность</a:t>
@@ -44757,7 +44721,6 @@
                 <a:solidFill>
                   <a:schemeClr val="dk1"/>
                 </a:solidFill>
-                <a:latin typeface="Hanken Grotesk"/>
                 <a:sym typeface="Hanken Grotesk"/>
               </a:rPr>
               <a:t>Должность</a:t>
@@ -45047,7 +45010,6 @@
                 <a:solidFill>
                   <a:schemeClr val="dk1"/>
                 </a:solidFill>
-                <a:latin typeface="Hanken Grotesk"/>
                 <a:sym typeface="Hanken Grotesk"/>
               </a:rPr>
               <a:t>Должность</a:t>
@@ -45329,12 +45291,16 @@
                 <a:solidFill>
                   <a:schemeClr val="dk1"/>
                 </a:solidFill>
-                <a:latin typeface="Hanken Grotesk"/>
                 <a:ea typeface="Hanken Grotesk"/>
-                <a:cs typeface="Hanken Grotesk"/>
               </a:rPr>
               <a:t>Должность</a:t>
             </a:r>
+            <a:endParaRPr lang="en" sz="1000">
+              <a:solidFill>
+                <a:schemeClr val="dk1"/>
+              </a:solidFill>
+              <a:ea typeface="Hanken Grotesk"/>
+            </a:endParaRPr>
           </a:p>
         </p:txBody>
       </p:sp>
@@ -45615,7 +45581,6 @@
                 <a:solidFill>
                   <a:schemeClr val="dk1"/>
                 </a:solidFill>
-                <a:latin typeface="Hanken Grotesk"/>
               </a:rPr>
               <a:t>Должность</a:t>
             </a:r>

--- a/slides/slide_13.pptx
+++ b/slides/slide_13.pptx
@@ -861,7 +861,7 @@
           <a:bodyPr/>
           <a:lstStyle/>
           <a:p>
-            <a:fld id="{641CF8F0-26AF-4448-84E0-953568653548}" type="datetimeFigureOut">
+            <a:fld id="{6D4FC505-B24A-4B34-8B52-45BF9346BD31}" type="datetimeFigureOut">
               <a:rPr lang="en-US" smtClean="0"/>
               <a:t>11/7/2009</a:t>
             </a:fld>
@@ -1025,7 +1025,7 @@
           <a:bodyPr/>
           <a:lstStyle/>
           <a:p>
-            <a:fld id="{6682788C-413D-4B2F-AD6B-219098FCF43A}" type="datetimeFigureOut">
+            <a:fld id="{4EFDA57D-A15B-47EF-8C42-62F0D2471FCB}" type="datetimeFigureOut">
               <a:rPr lang="en-US" smtClean="0"/>
               <a:t>11/7/2009</a:t>
             </a:fld>
@@ -1189,7 +1189,7 @@
           <a:bodyPr/>
           <a:lstStyle/>
           <a:p>
-            <a:fld id="{FF208E00-EAF6-4A26-8143-9E6AE4BF3130}" type="datetimeFigureOut">
+            <a:fld id="{5C5001EE-D90E-4D3F-BD18-B0D46F6D605F}" type="datetimeFigureOut">
               <a:rPr lang="en-US" smtClean="0"/>
               <a:t>11/7/2009</a:t>
             </a:fld>
@@ -13094,7 +13094,7 @@
           <a:bodyPr/>
           <a:lstStyle/>
           <a:p>
-            <a:fld id="{CF53255C-34D2-4A53-808B-A6F7346908AC}" type="datetimeFigureOut">
+            <a:fld id="{02B73D67-602B-44B9-A515-2C1FF107C020}" type="datetimeFigureOut">
               <a:rPr lang="en-US" smtClean="0"/>
               <a:t>11/7/2009</a:t>
             </a:fld>
@@ -33195,7 +33195,7 @@
           <a:bodyPr/>
           <a:lstStyle/>
           <a:p>
-            <a:fld id="{B6E7E754-FBAA-4359-A2EC-7E6C112CF463}" type="datetimeFigureOut">
+            <a:fld id="{4ABC00ED-8675-4519-B753-12BD28D1D695}" type="datetimeFigureOut">
               <a:rPr lang="en-US" smtClean="0"/>
               <a:t>11/7/2009</a:t>
             </a:fld>
@@ -38842,7 +38842,7 @@
           <a:bodyPr/>
           <a:lstStyle/>
           <a:p>
-            <a:fld id="{855F8D90-A3C5-4B89-8AF6-C32450C0769A}" type="datetimeFigureOut">
+            <a:fld id="{B750BA98-71FD-4A72-810F-6ACBB86D6F62}" type="datetimeFigureOut">
               <a:rPr lang="en-US" smtClean="0"/>
               <a:t>11/7/2009</a:t>
             </a:fld>
@@ -39231,7 +39231,7 @@
           <a:bodyPr/>
           <a:lstStyle/>
           <a:p>
-            <a:fld id="{8E9D5DB9-E3FC-424C-AFF5-F664C7BE4FAE}" type="datetimeFigureOut">
+            <a:fld id="{AA2D46CB-7D09-467B-86DC-618C3FC33572}" type="datetimeFigureOut">
               <a:rPr lang="en-US" smtClean="0"/>
               <a:t>11/7/2009</a:t>
             </a:fld>
@@ -39344,7 +39344,7 @@
           <a:bodyPr/>
           <a:lstStyle/>
           <a:p>
-            <a:fld id="{3244C19F-8EC8-4E1B-B729-33398B656CFA}" type="datetimeFigureOut">
+            <a:fld id="{C97C5BBB-04AD-4D5C-9A60-5C259431A26C}" type="datetimeFigureOut">
               <a:rPr lang="en-US" smtClean="0"/>
               <a:t>11/7/2009</a:t>
             </a:fld>
@@ -39434,7 +39434,7 @@
           <a:bodyPr/>
           <a:lstStyle/>
           <a:p>
-            <a:fld id="{CA6EFEB4-965B-48CA-B809-1802DAB743A0}" type="datetimeFigureOut">
+            <a:fld id="{6A200986-5CA0-43EB-B509-711149F8E689}" type="datetimeFigureOut">
               <a:rPr lang="en-US" smtClean="0"/>
               <a:t>11/7/2009</a:t>
             </a:fld>
@@ -39689,7 +39689,7 @@
           <a:bodyPr/>
           <a:lstStyle/>
           <a:p>
-            <a:fld id="{2ABC704A-858A-4DE3-911F-9651B363BE38}" type="datetimeFigureOut">
+            <a:fld id="{3FE9E129-C40B-451E-9BF1-499219A016DA}" type="datetimeFigureOut">
               <a:rPr lang="en-US" smtClean="0"/>
               <a:t>11/7/2009</a:t>
             </a:fld>
@@ -39921,7 +39921,7 @@
           <a:bodyPr/>
           <a:lstStyle/>
           <a:p>
-            <a:fld id="{3A361F35-8EB7-4797-9D8D-4DC5D1ED9BB0}" type="datetimeFigureOut">
+            <a:fld id="{7D1F558D-7008-4891-8900-A20EEDD52E97}" type="datetimeFigureOut">
               <a:rPr lang="en-US" smtClean="0"/>
               <a:t>11/7/2009</a:t>
             </a:fld>
